--- a/slides/presentation.pptx
+++ b/slides/presentation.pptx
@@ -3457,7 +3457,7 @@
                 </a:solidFill>
                 <a:latin typeface="Calibri"/>
               </a:rPr>
-              <a:t>[Team names]  |  Spring 2026</a:t>
+              <a:t>Priyansh Parikh  ·  Jeevan N V  ·  Narain Shriraam MS  ·  Akhil Teja Chirra  |  Spring 2026</a:t>
             </a:r>
           </a:p>
         </p:txBody>
